--- a/sayt/media/resources/2026/10/mehnat-muhofazasi-18-mavzu.pptx
+++ b/sayt/media/resources/2026/10/mehnat-muhofazasi-18-mavzu.pptx
@@ -12179,11 +12179,11 @@
         <p:spPr>
           <a:xfrm>
             <a:off x="731520" y="1645158"/>
-            <a:ext cx="10728655" cy="2080641"/>
+            <a:ext cx="10728655" cy="4389882"/>
           </a:xfrm>
           <a:prstGeom prst="roundRect">
             <a:avLst>
-              <a:gd name="adj" fmla="val 3515"/>
+              <a:gd name="adj" fmla="val 1666"/>
             </a:avLst>
           </a:prstGeom>
           <a:solidFill>
@@ -12227,7 +12227,7 @@
         <p:spPr>
           <a:xfrm>
             <a:off x="731520" y="1645158"/>
-            <a:ext cx="73152" cy="2080641"/>
+            <a:ext cx="73152" cy="4389882"/>
           </a:xfrm>
           <a:prstGeom prst="rect">
             <a:avLst/>
@@ -12336,176 +12336,6 @@
                 <a:latin typeface="Segoe UI"/>
               </a:rPr>
               <a:t>Soxta xabar yoki sayt orqali parol, karta ma’lumotlari kabi maxfiy ma’lumotlarni aldab olish.</a:t>
-            </a:r>
-          </a:p>
-        </p:txBody>
-      </p:sp>
-      <p:sp>
-        <p:nvSpPr>
-          <p:cNvPr id="41" name="Rounded Rectangle 40"/>
-          <p:cNvSpPr/>
-          <p:nvPr/>
-        </p:nvSpPr>
-        <p:spPr>
-          <a:xfrm>
-            <a:off x="731520" y="3954398"/>
-            <a:ext cx="10728655" cy="2080641"/>
-          </a:xfrm>
-          <a:prstGeom prst="roundRect">
-            <a:avLst>
-              <a:gd name="adj" fmla="val 3515"/>
-            </a:avLst>
-          </a:prstGeom>
-          <a:solidFill>
-            <a:srgbClr val="FBF6EC"/>
-          </a:solidFill>
-          <a:ln w="12700">
-            <a:solidFill>
-              <a:srgbClr val="D8C8AE"/>
-            </a:solidFill>
-          </a:ln>
-          <a:effectLst/>
-        </p:spPr>
-        <p:style>
-          <a:lnRef idx="1">
-            <a:schemeClr val="accent1"/>
-          </a:lnRef>
-          <a:fillRef idx="3">
-            <a:schemeClr val="accent1"/>
-          </a:fillRef>
-          <a:effectRef idx="2">
-            <a:schemeClr val="accent1"/>
-          </a:effectRef>
-          <a:fontRef idx="minor">
-            <a:schemeClr val="lt1"/>
-          </a:fontRef>
-        </p:style>
-        <p:txBody>
-          <a:bodyPr rtlCol="0" anchor="ctr"/>
-          <a:lstStyle/>
-          <a:p>
-            <a:pPr algn="ctr"/>
-          </a:p>
-        </p:txBody>
-      </p:sp>
-      <p:sp>
-        <p:nvSpPr>
-          <p:cNvPr id="42" name="Rectangle 41"/>
-          <p:cNvSpPr/>
-          <p:nvPr/>
-        </p:nvSpPr>
-        <p:spPr>
-          <a:xfrm>
-            <a:off x="731520" y="3954398"/>
-            <a:ext cx="73152" cy="2080641"/>
-          </a:xfrm>
-          <a:prstGeom prst="rect">
-            <a:avLst/>
-          </a:prstGeom>
-          <a:solidFill>
-            <a:srgbClr val="2F68B8"/>
-          </a:solidFill>
-          <a:ln>
-            <a:noFill/>
-          </a:ln>
-          <a:effectLst/>
-        </p:spPr>
-        <p:style>
-          <a:lnRef idx="1">
-            <a:schemeClr val="accent1"/>
-          </a:lnRef>
-          <a:fillRef idx="3">
-            <a:schemeClr val="accent1"/>
-          </a:fillRef>
-          <a:effectRef idx="2">
-            <a:schemeClr val="accent1"/>
-          </a:effectRef>
-          <a:fontRef idx="minor">
-            <a:schemeClr val="lt1"/>
-          </a:fontRef>
-        </p:style>
-        <p:txBody>
-          <a:bodyPr rtlCol="0" anchor="ctr"/>
-          <a:lstStyle/>
-          <a:p>
-            <a:pPr algn="ctr"/>
-          </a:p>
-        </p:txBody>
-      </p:sp>
-      <p:sp>
-        <p:nvSpPr>
-          <p:cNvPr id="43" name="TextBox 42"/>
-          <p:cNvSpPr txBox="1"/>
-          <p:nvPr/>
-        </p:nvSpPr>
-        <p:spPr>
-          <a:xfrm>
-            <a:off x="1005840" y="4118990"/>
-            <a:ext cx="10682313" cy="367029"/>
-          </a:xfrm>
-          <a:prstGeom prst="rect">
-            <a:avLst/>
-          </a:prstGeom>
-          <a:noFill/>
-        </p:spPr>
-        <p:txBody>
-          <a:bodyPr wrap="square" lIns="0" rIns="0" tIns="0" bIns="0" anchor="t">
-            <a:spAutoFit/>
-          </a:bodyPr>
-          <a:lstStyle/>
-          <a:p>
-            <a:pPr algn="l">
-              <a:lnSpc>
-                <a:spcPts val="2529"/>
-              </a:lnSpc>
-            </a:pPr>
-            <a:r>
-              <a:rPr sz="2200" b="1">
-                <a:solidFill>
-                  <a:srgbClr val="1B2A4A"/>
-                </a:solidFill>
-                <a:latin typeface="Georgia"/>
-              </a:rPr>
-              <a:t>Grafik dizayner ishining natijasi</a:t>
-            </a:r>
-          </a:p>
-        </p:txBody>
-      </p:sp>
-      <p:sp>
-        <p:nvSpPr>
-          <p:cNvPr id="44" name="TextBox 43"/>
-          <p:cNvSpPr txBox="1"/>
-          <p:nvPr/>
-        </p:nvSpPr>
-        <p:spPr>
-          <a:xfrm>
-            <a:off x="1005840" y="4531740"/>
-            <a:ext cx="10682313" cy="359410"/>
-          </a:xfrm>
-          <a:prstGeom prst="rect">
-            <a:avLst/>
-          </a:prstGeom>
-          <a:noFill/>
-        </p:spPr>
-        <p:txBody>
-          <a:bodyPr wrap="square" lIns="0" rIns="0" tIns="0" bIns="0" anchor="t">
-            <a:spAutoFit/>
-          </a:bodyPr>
-          <a:lstStyle/>
-          <a:p>
-            <a:pPr algn="l">
-              <a:lnSpc>
-                <a:spcPts val="2470"/>
-              </a:lnSpc>
-            </a:pPr>
-            <a:r>
-              <a:rPr sz="1900" b="0">
-                <a:solidFill>
-                  <a:srgbClr val="3A4560"/>
-                </a:solidFill>
-                <a:latin typeface="Segoe UI"/>
-              </a:rPr>
-              <a:t>Raqamli fayllar: logotiplar, brendbuklar, maketlar, mijozlarning maxfiy materiallari.</a:t>
             </a:r>
           </a:p>
         </p:txBody>
@@ -18548,7 +18378,7 @@
                 </a:solidFill>
                 <a:latin typeface="Georgia"/>
               </a:rPr>
-              <a:t>Parol siyosati va ikki bosqichli tasdiqlash (2fa)</a:t>
+              <a:t>Parol siyosati va ikki bosqichli tasdiqlash (2FA)</a:t>
             </a:r>
           </a:p>
         </p:txBody>
